--- a/wavesplat/docs/WaveSplat_Algorithm_Guide.pptx
+++ b/wavesplat/docs/WaveSplat_Algorithm_Guide.pptx
@@ -17418,7 +17418,7 @@
               </a:defRPr>
             </a:pPr>
             <a:r>
-              <a:t>  → 64 x 128 x 128 = ~1백만 후보 → 느림</a:t>
+              <a:t>  → 81 x 81 x 81 = ~531,441 후보 → 느림</a:t>
             </a:r>
           </a:p>
           <a:p>
@@ -17463,7 +17463,7 @@
               </a:defRPr>
             </a:pPr>
             <a:r>
-              <a:t>  → 64 x 128 = 8,192 후보 → 128배 빠름</a:t>
+              <a:t>  → 81 x 81 = 6,561 후보 → ~81배 빠름</a:t>
             </a:r>
           </a:p>
           <a:p>
@@ -18155,7 +18155,7 @@
               </a:defRPr>
             </a:pPr>
             <a:r>
-              <a:t>극좌표 격자 — 왜 극좌표인가</a:t>
+              <a:t>직교좌표 격자 — 왜 Cartesian인가</a:t>
             </a:r>
           </a:p>
         </p:txBody>
@@ -18191,113 +18191,113 @@
               </a:defRPr>
             </a:pPr>
             <a:r>
-              <a:t>!! 탐색 격자: |k| x 방위각 = 64 x 128 = 8,192 후보</a:t>
-            </a:r>
-          </a:p>
-          <a:p>
-            <a:pPr algn="l">
-              <a:spcBef>
-                <a:spcPts val="600"/>
-              </a:spcBef>
-              <a:defRPr sz="1800" b="0">
-                <a:solidFill>
-                  <a:srgbClr val="FFFFFF"/>
-                </a:solidFill>
-                <a:latin typeface="맑은 고딕"/>
-              </a:defRPr>
-            </a:pPr>
-          </a:p>
-          <a:p>
-            <a:pPr algn="l">
-              <a:spcBef>
-                <a:spcPts val="600"/>
-              </a:spcBef>
-              <a:defRPr sz="1800" b="0">
-                <a:solidFill>
-                  <a:srgbClr val="FFFFFF"/>
-                </a:solidFill>
-                <a:latin typeface="맑은 고딕"/>
-              </a:defRPr>
-            </a:pPr>
-            <a:r>
-              <a:t>|k| 범위: 0.02 ~ 0.50 rad/m</a:t>
-            </a:r>
-          </a:p>
-          <a:p>
-            <a:pPr algn="l">
-              <a:spcBef>
-                <a:spcPts val="600"/>
-              </a:spcBef>
-              <a:defRPr sz="1800" b="0">
-                <a:solidFill>
-                  <a:srgbClr val="FFFFFF"/>
-                </a:solidFill>
-                <a:latin typeface="맑은 고딕"/>
-              </a:defRPr>
-            </a:pPr>
-            <a:r>
-              <a:t>  → 파장 12.6m ~ 314m (BF2~5 커버)</a:t>
-            </a:r>
-          </a:p>
-          <a:p>
-            <a:pPr algn="l">
-              <a:spcBef>
-                <a:spcPts val="600"/>
-              </a:spcBef>
-              <a:defRPr sz="1800" b="0">
-                <a:solidFill>
-                  <a:srgbClr val="FFFFFF"/>
-                </a:solidFill>
-                <a:latin typeface="맑은 고딕"/>
-              </a:defRPr>
-            </a:pPr>
-            <a:r>
-              <a:t>  → 64개 균등 분할</a:t>
-            </a:r>
-          </a:p>
-          <a:p>
-            <a:pPr algn="l">
-              <a:spcBef>
-                <a:spcPts val="600"/>
-              </a:spcBef>
-              <a:defRPr sz="1800" b="0">
-                <a:solidFill>
-                  <a:srgbClr val="FFFFFF"/>
-                </a:solidFill>
-                <a:latin typeface="맑은 고딕"/>
-              </a:defRPr>
-            </a:pPr>
-          </a:p>
-          <a:p>
-            <a:pPr algn="l">
-              <a:spcBef>
-                <a:spcPts val="600"/>
-              </a:spcBef>
-              <a:defRPr sz="1800" b="0">
-                <a:solidFill>
-                  <a:srgbClr val="FFFFFF"/>
-                </a:solidFill>
-                <a:latin typeface="맑은 고딕"/>
-              </a:defRPr>
-            </a:pPr>
-            <a:r>
-              <a:t>방위각: 0 ~ 360도</a:t>
-            </a:r>
-          </a:p>
-          <a:p>
-            <a:pPr algn="l">
-              <a:spcBef>
-                <a:spcPts val="600"/>
-              </a:spcBef>
-              <a:defRPr sz="1800" b="0">
-                <a:solidFill>
-                  <a:srgbClr val="FFFFFF"/>
-                </a:solidFill>
-                <a:latin typeface="맑은 고딕"/>
-              </a:defRPr>
-            </a:pPr>
-            <a:r>
-              <a:t>  → 128개 균등 분할 (2.8도 간격)</a:t>
+              <a:t>!! 탐색 격자: kx, ky ∈ [-4.0, 4.0] rad/m, 81×81 = 6,561 후보</a:t>
+            </a:r>
+          </a:p>
+          <a:p>
+            <a:pPr algn="l">
+              <a:spcBef>
+                <a:spcPts val="600"/>
+              </a:spcBef>
+              <a:defRPr sz="1800" b="0">
+                <a:solidFill>
+                  <a:srgbClr val="FFFFFF"/>
+                </a:solidFill>
+                <a:latin typeface="맑은 고딕"/>
+              </a:defRPr>
+            </a:pPr>
+          </a:p>
+          <a:p>
+            <a:pPr algn="l">
+              <a:spcBef>
+                <a:spcPts val="600"/>
+              </a:spcBef>
+              <a:defRPr sz="1800" b="0">
+                <a:solidFill>
+                  <a:srgbClr val="FFFFFF"/>
+                </a:solidFill>
+                <a:latin typeface="맑은 고딕"/>
+              </a:defRPr>
+            </a:pPr>
+            <a:r>
+              <a:t>격자 해상도: Δk ≈ 0.10 rad/m</a:t>
+            </a:r>
+          </a:p>
+          <a:p>
+            <a:pPr algn="l">
+              <a:spcBef>
+                <a:spcPts val="600"/>
+              </a:spcBef>
+              <a:defRPr sz="1800" b="0">
+                <a:solidFill>
+                  <a:srgbClr val="FFFFFF"/>
+                </a:solidFill>
+                <a:latin typeface="맑은 고딕"/>
+              </a:defRPr>
+            </a:pPr>
+            <a:r>
+              <a:t>  → 파장 ~1.6m ~ 130m (BF2~5 커버)</a:t>
+            </a:r>
+          </a:p>
+          <a:p>
+            <a:pPr algn="l">
+              <a:spcBef>
+                <a:spcPts val="600"/>
+              </a:spcBef>
+              <a:defRPr sz="1800" b="0">
+                <a:solidFill>
+                  <a:srgbClr val="FFFFFF"/>
+                </a:solidFill>
+                <a:latin typeface="맑은 고딕"/>
+              </a:defRPr>
+            </a:pPr>
+            <a:r>
+              <a:t/>
+            </a:r>
+          </a:p>
+          <a:p>
+            <a:pPr algn="l">
+              <a:spcBef>
+                <a:spcPts val="600"/>
+              </a:spcBef>
+              <a:defRPr sz="1800" b="0">
+                <a:solidFill>
+                  <a:srgbClr val="FFFFFF"/>
+                </a:solidFill>
+                <a:latin typeface="맑은 고딕"/>
+              </a:defRPr>
+            </a:pPr>
+          </a:p>
+          <a:p>
+            <a:pPr algn="l">
+              <a:spcBef>
+                <a:spcPts val="600"/>
+              </a:spcBef>
+              <a:defRPr sz="1800" b="0">
+                <a:solidFill>
+                  <a:srgbClr val="FFFFFF"/>
+                </a:solidFill>
+                <a:latin typeface="맑은 고딕"/>
+              </a:defRPr>
+            </a:pPr>
+            <a:r>
+              <a:t/>
+            </a:r>
+          </a:p>
+          <a:p>
+            <a:pPr algn="l">
+              <a:spcBef>
+                <a:spcPts val="600"/>
+              </a:spcBef>
+              <a:defRPr sz="1800" b="0">
+                <a:solidFill>
+                  <a:srgbClr val="FFFFFF"/>
+                </a:solidFill>
+                <a:latin typeface="맑은 고딕"/>
+              </a:defRPr>
+            </a:pPr>
+            <a:r>
+              <a:t/>
             </a:r>
           </a:p>
           <a:p>
@@ -18326,55 +18326,55 @@
               </a:defRPr>
             </a:pPr>
             <a:r>
-              <a:t>왜 극좌표?</a:t>
-            </a:r>
-          </a:p>
-          <a:p>
-            <a:pPr algn="l">
-              <a:spcBef>
-                <a:spcPts val="600"/>
-              </a:spcBef>
-              <a:defRPr sz="1800" b="0">
-                <a:solidFill>
-                  <a:srgbClr val="FFFFFF"/>
-                </a:solidFill>
-                <a:latin typeface="맑은 고딕"/>
-              </a:defRPr>
-            </a:pPr>
-            <a:r>
-              <a:t>  1. 방향 해상도가 균일 (직교 격자에서는 대각선 해상도 떨어짐)</a:t>
-            </a:r>
-          </a:p>
-          <a:p>
-            <a:pPr algn="l">
-              <a:spcBef>
-                <a:spcPts val="600"/>
-              </a:spcBef>
-              <a:defRPr sz="1800" b="0">
-                <a:solidFill>
-                  <a:srgbClr val="FFFFFF"/>
-                </a:solidFill>
-                <a:latin typeface="맑은 고딕"/>
-              </a:defRPr>
-            </a:pPr>
-            <a:r>
-              <a:t>  2. 파도의 물리가 방향+파수 크기로 자연스럽게 분리</a:t>
-            </a:r>
-          </a:p>
-          <a:p>
-            <a:pPr algn="l">
-              <a:spcBef>
-                <a:spcPts val="600"/>
-              </a:spcBef>
-              <a:defRPr sz="1800" b="0">
-                <a:solidFill>
-                  <a:srgbClr val="FFFFFF"/>
-                </a:solidFill>
-                <a:latin typeface="맑은 고딕"/>
-              </a:defRPr>
-            </a:pPr>
-            <a:r>
-              <a:t>  3. 각도 억제(sidelobe 제거)가 자연스러움</a:t>
+              <a:t>왜 직교좌표(Cartesian)?</a:t>
+            </a:r>
+          </a:p>
+          <a:p>
+            <a:pPr algn="l">
+              <a:spcBef>
+                <a:spcPts val="600"/>
+              </a:spcBef>
+              <a:defRPr sz="1800" b="0">
+                <a:solidFill>
+                  <a:srgbClr val="FFFFFF"/>
+                </a:solidFill>
+                <a:latin typeface="맑은 고딕"/>
+              </a:defRPr>
+            </a:pPr>
+            <a:r>
+              <a:t>  1. 구현이 단순하고 NumPy 배열 인덱싱에 자연스럽게 대응</a:t>
+            </a:r>
+          </a:p>
+          <a:p>
+            <a:pPr algn="l">
+              <a:spcBef>
+                <a:spcPts val="600"/>
+              </a:spcBef>
+              <a:defRPr sz="1800" b="0">
+                <a:solidFill>
+                  <a:srgbClr val="FFFFFF"/>
+                </a:solidFill>
+                <a:latin typeface="맑은 고딕"/>
+              </a:defRPr>
+            </a:pPr>
+            <a:r>
+              <a:t>  2. kx/ky 범위를 분산관계 기반으로 직관적으로 설정 가능</a:t>
+            </a:r>
+          </a:p>
+          <a:p>
+            <a:pPr algn="l">
+              <a:spcBef>
+                <a:spcPts val="600"/>
+              </a:spcBef>
+              <a:defRPr sz="1800" b="0">
+                <a:solidFill>
+                  <a:srgbClr val="FFFFFF"/>
+                </a:solidFill>
+                <a:latin typeface="맑은 고딕"/>
+              </a:defRPr>
+            </a:pPr>
+            <a:r>
+              <a:t>  3. Cartesian 반경 억제로 sidelobe 제거 (0.15 rad/m)</a:t>
             </a:r>
           </a:p>
         </p:txBody>
@@ -19968,7 +19968,7 @@
               </a:defRPr>
             </a:pPr>
             <a:r>
-              <a:t>  64 x 128 격자 → |k| 해상도 ~0.0075 rad/m</a:t>
+              <a:t>  81×81 격자 → kx/ky 해상도 Δk ≈ 0.10 rad/m</a:t>
             </a:r>
           </a:p>
           <a:p>

--- a/wavesplat/docs/WaveSplat_Algorithm_Guide.pptx
+++ b/wavesplat/docs/WaveSplat_Algorithm_Guide.pptx
@@ -25159,7 +25159,9 @@
               </a:defRPr>
             </a:pPr>
             <a:r>
-              <a:t>초기화가 좋으면 → 추적은 소량 보정만 → 빠르고 안정</a:t>
+              <a:t>초기화가 좋으면 → 추적은 소량 보정만 → 빠르고 안정
+⚠ 초기화에서 놓친 고주파 성분(|k|≥0.4 rad/m)은 추적으로 복원 불가
+  → 추적의 이점은 정확도가 아닌 계산 효율성(10 steps vs 600 steps)</a:t>
             </a:r>
           </a:p>
         </p:txBody>

--- a/wavesplat/docs/WaveSplat_Algorithm_Guide.pptx
+++ b/wavesplat/docs/WaveSplat_Algorithm_Guide.pptx
@@ -20838,6 +20838,23 @@
               <a:t>원거리 저각도 관측은 자동으로 가중치 감소</a:t>
             </a:r>
           </a:p>
+          <a:p>
+            <a:pPr algn="l">
+              <a:spcBef>
+                <a:spcPts val="600"/>
+              </a:spcBef>
+              <a:defRPr sz="1600" b="0">
+                <a:solidFill>
+                  <a:srgbClr val="4DD0E1"/>
+                </a:solidFill>
+                <a:latin typeface="맑은 고딕"/>
+              </a:defRPr>
+            </a:pPr>
+            <a:r>
+              <a:rPr lang="ko-KR"/>
+              <a:t>법선 근사 오차: sim=Gerstner 실제법선, 실측=flat(n≈z) 가정 → θ&lt;30°에서 &lt;2%, θ≈60°에서 ~9%</a:t>
+            </a:r>
+          </a:p>
         </p:txBody>
       </p:sp>
     </p:spTree>
@@ -24372,6 +24389,23 @@
             </a:pPr>
             <a:r>
               <a:t>고정 N=15 대비 6.4% 추가 nRMSE 개선</a:t>
+            </a:r>
+          </a:p>
+          <a:p>
+            <a:pPr algn="l">
+              <a:spcBef>
+                <a:spcPts val="600"/>
+              </a:spcBef>
+              <a:defRPr sz="1600" b="0">
+                <a:solidFill>
+                  <a:srgbClr val="4DD0E1"/>
+                </a:solidFill>
+                <a:latin typeface="맑은 고딕"/>
+              </a:defRPr>
+            </a:pPr>
+            <a:r>
+              <a:rPr lang="ko-KR"/>
+              <a:t>τ_R 민감도 (12 episodes): τ=0.05→0.2114(최적), τ=0.08~0.15→+1.1~1.6%, τ=0.02→+3.3%(과성장)</a:t>
             </a:r>
           </a:p>
         </p:txBody>

--- a/wavesplat/docs/WaveSplat_Algorithm_Guide.pptx
+++ b/wavesplat/docs/WaveSplat_Algorithm_Guide.pptx
@@ -5145,6 +5145,23 @@
               <a:t>관측 노이즈 &gt;&gt; 비선형 오차</a:t>
             </a:r>
           </a:p>
+          <a:p>
+            <a:pPr algn="l">
+              <a:spcBef>
+                <a:spcPts val="600"/>
+              </a:spcBef>
+              <a:defRPr sz="1600" b="0">
+                <a:solidFill>
+                  <a:srgbClr val="4DD0E1"/>
+                </a:solidFill>
+                <a:latin typeface="맑은 고딕"/>
+              </a:defRPr>
+            </a:pPr>
+            <a:r>
+              <a:rPr lang="ko-KR"/>
+              <a:t>GT: Gerstner wave(비선형), 추정: linear(선형). BF3-4에서 Δz~1.5-6mm &lt; noise(20mm) → 설계된 불일치</a:t>
+            </a:r>
+          </a:p>
         </p:txBody>
       </p:sp>
     </p:spTree>
@@ -10267,6 +10284,23 @@
               <a:t>  실제로는 '아무것도 예측하지 않는 것'에 가까움</a:t>
             </a:r>
           </a:p>
+          <a:p>
+            <a:pPr algn="l">
+              <a:spcBef>
+                <a:spcPts val="600"/>
+              </a:spcBef>
+              <a:defRPr sz="1800" b="0">
+                <a:solidFill>
+                  <a:srgbClr val="FFFFFF"/>
+                </a:solidFill>
+                <a:latin typeface="맑은 고딕"/>
+              </a:defRPr>
+            </a:pPr>
+            <a:r>
+              <a:rPr lang="ko-KR"/>
+              <a:t>수학적 원인: sparse data + 단일 l=20m → 관측 밖 μ≈0, 시간 무시 → 위상 평균화 → flat</a:t>
+            </a:r>
+          </a:p>
         </p:txBody>
       </p:sp>
     </p:spTree>
@@ -17588,6 +17622,23 @@
               <a:t>빔포밍 = 좋은 초기 추정 → 최적화 = 정밀 보정</a:t>
             </a:r>
           </a:p>
+          <a:p>
+            <a:pPr algn="l">
+              <a:spcBef>
+                <a:spcPts val="600"/>
+              </a:spcBef>
+              <a:defRPr sz="1600" b="0">
+                <a:solidFill>
+                  <a:srgbClr val="4DD0E1"/>
+                </a:solidFill>
+                <a:latin typeface="맑은 고딕"/>
+              </a:defRPr>
+            </a:pPr>
+            <a:r>
+              <a:rPr lang="ko-KR"/>
+              <a:t>ω(k)로 시간 위상 de-rotate → 다중 프레임 보강 간섭 극대화 (temporal coherence)</a:t>
+            </a:r>
+          </a:p>
         </p:txBody>
       </p:sp>
     </p:spTree>
@@ -21365,6 +21416,23 @@
               <a:t>         + (2/M) * SUM_j cj*(zj-z_hat_j)*w_i*(domega/dkx_i)*tj*sin(...)</a:t>
             </a:r>
           </a:p>
+          <a:p>
+            <a:pPr algn="ctr">
+              <a:spcBef>
+                <a:spcPts val="1200"/>
+              </a:spcBef>
+              <a:defRPr sz="2400" b="0">
+                <a:solidFill>
+                  <a:srgbClr val="FFD54F"/>
+                </a:solidFill>
+                <a:latin typeface="Consolas"/>
+              </a:defRPr>
+            </a:pPr>
+            <a:r>
+              <a:rPr lang="ko-KR"/>
+              <a:t>A1 Ablation: ω 자유 시 R̄=0.51(과적합). 분산관계=정규화 → off-shell 해 차단 → C1 근거</a:t>
+            </a:r>
+          </a:p>
         </p:txBody>
       </p:sp>
       <p:sp>
@@ -24751,6 +24819,23 @@
               <a:t>너울/복잡해 모두 자동 적응 → 수동 튜닝 불필요</a:t>
             </a:r>
           </a:p>
+          <a:p>
+            <a:pPr algn="l">
+              <a:spcBef>
+                <a:spcPts val="600"/>
+              </a:spcBef>
+              <a:defRPr sz="1600" b="0">
+                <a:solidFill>
+                  <a:srgbClr val="4DD0E1"/>
+                </a:solidFill>
+                <a:latin typeface="맑은 고딕"/>
+              </a:defRPr>
+            </a:pPr>
+            <a:r>
+              <a:rPr lang="ko-KR"/>
+              <a:t>Grown component는 C2F 미적용 (잔차 빔포밍+LS로 바로 합류, 계산 효율 우선)</a:t>
+            </a:r>
+          </a:p>
         </p:txBody>
       </p:sp>
     </p:spTree>
@@ -26912,6 +26997,23 @@
               <a:t>남은 86%는 다른 선박 시스템 (제어, 항법, 안전 모니터링)에 할당</a:t>
             </a:r>
           </a:p>
+          <a:p>
+            <a:pPr algn="l">
+              <a:spcBef>
+                <a:spcPts val="600"/>
+              </a:spcBef>
+              <a:defRPr sz="1600" b="0">
+                <a:solidFill>
+                  <a:srgbClr val="4DD0E1"/>
+                </a:solidFill>
+                <a:latin typeface="맑은 고딕"/>
+              </a:defRPr>
+            </a:pPr>
+            <a:r>
+              <a:rPr lang="ko-KR"/>
+              <a:t>10 steps 근거: ~95% loss 수렴, 추가 step은 &lt;1% 개선. BF2-3은 5로도 충분, BF4-5는 10 필요</a:t>
+            </a:r>
+          </a:p>
         </p:txBody>
       </p:sp>
     </p:spTree>
@@ -31515,6 +31617,23 @@
             </a:pPr>
             <a:r>
               <a:t>수조 실험(Ch5)으로 sim-to-real gap 검증 예정</a:t>
+            </a:r>
+          </a:p>
+          <a:p>
+            <a:pPr algn="l">
+              <a:spcBef>
+                <a:spcPts val="600"/>
+              </a:spcBef>
+              <a:defRPr sz="1600" b="0">
+                <a:solidFill>
+                  <a:srgbClr val="4DD0E1"/>
+                </a:solidFill>
+                <a:latin typeface="맑은 고딕"/>
+              </a:defRPr>
+            </a:pPr>
+            <a:r>
+              <a:rPr lang="ko-KR"/>
+              <a:t>Dir R²=-0.25 원인: forward LiDAR ±θ 모호성. kx&gt;0 vs kx&lt;0 구분 불가 (기하학적 한계, 알고리즘 결함 아님)</a:t>
             </a:r>
           </a:p>
         </p:txBody>
